--- a/主禱文(請教導我們禱告)_同心圓.pptx
+++ b/主禱文(請教導我們禱告)_同心圓.pptx
@@ -121,6 +121,11 @@
       </a:defRPr>
     </a:lvl9pPr>
   </p:defaultTextStyle>
+  <p:extLst>
+    <p:ext uri="{EFAFB233-063F-42B5-8137-9DF3F51BA10A}">
+      <p15:sldGuideLst xmlns:p15="http://schemas.microsoft.com/office/powerpoint/2012/main"/>
+    </p:ext>
+  </p:extLst>
 </p:presentation>
 </file>
 
@@ -162,7 +167,7 @@
           <a:lstStyle/>
           <a:p>
             <a:r>
-              <a:rPr lang="en-US" altLang="zh-TW" smtClean="0"/>
+              <a:rPr lang="en-US" altLang="zh-TW"/>
               <a:t>Click to edit Master title style</a:t>
             </a:r>
             <a:endParaRPr lang="zh-TW" altLang="en-US"/>
@@ -281,7 +286,7 @@
           </a:lstStyle>
           <a:p>
             <a:r>
-              <a:rPr lang="en-US" altLang="zh-TW" smtClean="0"/>
+              <a:rPr lang="en-US" altLang="zh-TW"/>
               <a:t>Click to edit Master subtitle style</a:t>
             </a:r>
             <a:endParaRPr lang="zh-TW" altLang="en-US"/>
@@ -305,7 +310,7 @@
           <a:p>
             <a:fld id="{E8040ED9-C24F-4461-8242-555DFFCA2203}" type="datetimeFigureOut">
               <a:rPr lang="vi-VN" smtClean="0"/>
-              <a:t>23/03/2022</a:t>
+              <a:t>05/05/2024</a:t>
             </a:fld>
             <a:endParaRPr lang="vi-VN"/>
           </a:p>
@@ -399,7 +404,7 @@
           <a:lstStyle/>
           <a:p>
             <a:r>
-              <a:rPr lang="en-US" altLang="zh-TW" smtClean="0"/>
+              <a:rPr lang="en-US" altLang="zh-TW"/>
               <a:t>Click to edit Master title style</a:t>
             </a:r>
             <a:endParaRPr lang="zh-TW" altLang="en-US"/>
@@ -423,35 +428,35 @@
           <a:p>
             <a:pPr lvl="0"/>
             <a:r>
-              <a:rPr lang="en-US" altLang="zh-TW" smtClean="0"/>
+              <a:rPr lang="en-US" altLang="zh-TW"/>
               <a:t>Edit Master text styles</a:t>
             </a:r>
           </a:p>
           <a:p>
             <a:pPr lvl="1"/>
             <a:r>
-              <a:rPr lang="en-US" altLang="zh-TW" smtClean="0"/>
+              <a:rPr lang="en-US" altLang="zh-TW"/>
               <a:t>Second level</a:t>
             </a:r>
           </a:p>
           <a:p>
             <a:pPr lvl="2"/>
             <a:r>
-              <a:rPr lang="en-US" altLang="zh-TW" smtClean="0"/>
+              <a:rPr lang="en-US" altLang="zh-TW"/>
               <a:t>Third level</a:t>
             </a:r>
           </a:p>
           <a:p>
             <a:pPr lvl="3"/>
             <a:r>
-              <a:rPr lang="en-US" altLang="zh-TW" smtClean="0"/>
+              <a:rPr lang="en-US" altLang="zh-TW"/>
               <a:t>Fourth level</a:t>
             </a:r>
           </a:p>
           <a:p>
             <a:pPr lvl="4"/>
             <a:r>
-              <a:rPr lang="en-US" altLang="zh-TW" smtClean="0"/>
+              <a:rPr lang="en-US" altLang="zh-TW"/>
               <a:t>Fifth level</a:t>
             </a:r>
             <a:endParaRPr lang="zh-TW" altLang="en-US"/>
@@ -475,7 +480,7 @@
           <a:p>
             <a:fld id="{E8040ED9-C24F-4461-8242-555DFFCA2203}" type="datetimeFigureOut">
               <a:rPr lang="vi-VN" smtClean="0"/>
-              <a:t>23/03/2022</a:t>
+              <a:t>05/05/2024</a:t>
             </a:fld>
             <a:endParaRPr lang="vi-VN"/>
           </a:p>
@@ -574,7 +579,7 @@
           <a:lstStyle/>
           <a:p>
             <a:r>
-              <a:rPr lang="en-US" altLang="zh-TW" smtClean="0"/>
+              <a:rPr lang="en-US" altLang="zh-TW"/>
               <a:t>Click to edit Master title style</a:t>
             </a:r>
             <a:endParaRPr lang="zh-TW" altLang="en-US"/>
@@ -603,35 +608,35 @@
           <a:p>
             <a:pPr lvl="0"/>
             <a:r>
-              <a:rPr lang="en-US" altLang="zh-TW" smtClean="0"/>
+              <a:rPr lang="en-US" altLang="zh-TW"/>
               <a:t>Edit Master text styles</a:t>
             </a:r>
           </a:p>
           <a:p>
             <a:pPr lvl="1"/>
             <a:r>
-              <a:rPr lang="en-US" altLang="zh-TW" smtClean="0"/>
+              <a:rPr lang="en-US" altLang="zh-TW"/>
               <a:t>Second level</a:t>
             </a:r>
           </a:p>
           <a:p>
             <a:pPr lvl="2"/>
             <a:r>
-              <a:rPr lang="en-US" altLang="zh-TW" smtClean="0"/>
+              <a:rPr lang="en-US" altLang="zh-TW"/>
               <a:t>Third level</a:t>
             </a:r>
           </a:p>
           <a:p>
             <a:pPr lvl="3"/>
             <a:r>
-              <a:rPr lang="en-US" altLang="zh-TW" smtClean="0"/>
+              <a:rPr lang="en-US" altLang="zh-TW"/>
               <a:t>Fourth level</a:t>
             </a:r>
           </a:p>
           <a:p>
             <a:pPr lvl="4"/>
             <a:r>
-              <a:rPr lang="en-US" altLang="zh-TW" smtClean="0"/>
+              <a:rPr lang="en-US" altLang="zh-TW"/>
               <a:t>Fifth level</a:t>
             </a:r>
             <a:endParaRPr lang="zh-TW" altLang="en-US"/>
@@ -655,7 +660,7 @@
           <a:p>
             <a:fld id="{E8040ED9-C24F-4461-8242-555DFFCA2203}" type="datetimeFigureOut">
               <a:rPr lang="vi-VN" smtClean="0"/>
-              <a:t>23/03/2022</a:t>
+              <a:t>05/05/2024</a:t>
             </a:fld>
             <a:endParaRPr lang="vi-VN"/>
           </a:p>
@@ -749,7 +754,7 @@
           <a:lstStyle/>
           <a:p>
             <a:r>
-              <a:rPr lang="en-US" altLang="zh-TW" smtClean="0"/>
+              <a:rPr lang="en-US" altLang="zh-TW"/>
               <a:t>Click to edit Master title style</a:t>
             </a:r>
             <a:endParaRPr lang="zh-TW" altLang="en-US"/>
@@ -773,35 +778,35 @@
           <a:p>
             <a:pPr lvl="0"/>
             <a:r>
-              <a:rPr lang="en-US" altLang="zh-TW" smtClean="0"/>
+              <a:rPr lang="en-US" altLang="zh-TW"/>
               <a:t>Edit Master text styles</a:t>
             </a:r>
           </a:p>
           <a:p>
             <a:pPr lvl="1"/>
             <a:r>
-              <a:rPr lang="en-US" altLang="zh-TW" smtClean="0"/>
+              <a:rPr lang="en-US" altLang="zh-TW"/>
               <a:t>Second level</a:t>
             </a:r>
           </a:p>
           <a:p>
             <a:pPr lvl="2"/>
             <a:r>
-              <a:rPr lang="en-US" altLang="zh-TW" smtClean="0"/>
+              <a:rPr lang="en-US" altLang="zh-TW"/>
               <a:t>Third level</a:t>
             </a:r>
           </a:p>
           <a:p>
             <a:pPr lvl="3"/>
             <a:r>
-              <a:rPr lang="en-US" altLang="zh-TW" smtClean="0"/>
+              <a:rPr lang="en-US" altLang="zh-TW"/>
               <a:t>Fourth level</a:t>
             </a:r>
           </a:p>
           <a:p>
             <a:pPr lvl="4"/>
             <a:r>
-              <a:rPr lang="en-US" altLang="zh-TW" smtClean="0"/>
+              <a:rPr lang="en-US" altLang="zh-TW"/>
               <a:t>Fifth level</a:t>
             </a:r>
             <a:endParaRPr lang="zh-TW" altLang="en-US"/>
@@ -825,7 +830,7 @@
           <a:p>
             <a:fld id="{E8040ED9-C24F-4461-8242-555DFFCA2203}" type="datetimeFigureOut">
               <a:rPr lang="vi-VN" smtClean="0"/>
-              <a:t>23/03/2022</a:t>
+              <a:t>05/05/2024</a:t>
             </a:fld>
             <a:endParaRPr lang="vi-VN"/>
           </a:p>
@@ -928,7 +933,7 @@
           </a:lstStyle>
           <a:p>
             <a:r>
-              <a:rPr lang="en-US" altLang="zh-TW" smtClean="0"/>
+              <a:rPr lang="en-US" altLang="zh-TW"/>
               <a:t>Click to edit Master title style</a:t>
             </a:r>
             <a:endParaRPr lang="zh-TW" altLang="en-US"/>
@@ -1048,7 +1053,7 @@
           <a:p>
             <a:pPr lvl="0"/>
             <a:r>
-              <a:rPr lang="en-US" altLang="zh-TW" smtClean="0"/>
+              <a:rPr lang="en-US" altLang="zh-TW"/>
               <a:t>Edit Master text styles</a:t>
             </a:r>
           </a:p>
@@ -1071,7 +1076,7 @@
           <a:p>
             <a:fld id="{E8040ED9-C24F-4461-8242-555DFFCA2203}" type="datetimeFigureOut">
               <a:rPr lang="vi-VN" smtClean="0"/>
-              <a:t>23/03/2022</a:t>
+              <a:t>05/05/2024</a:t>
             </a:fld>
             <a:endParaRPr lang="vi-VN"/>
           </a:p>
@@ -1165,7 +1170,7 @@
           <a:lstStyle/>
           <a:p>
             <a:r>
-              <a:rPr lang="en-US" altLang="zh-TW" smtClean="0"/>
+              <a:rPr lang="en-US" altLang="zh-TW"/>
               <a:t>Click to edit Master title style</a:t>
             </a:r>
             <a:endParaRPr lang="zh-TW" altLang="en-US"/>
@@ -1222,35 +1227,35 @@
           <a:p>
             <a:pPr lvl="0"/>
             <a:r>
-              <a:rPr lang="en-US" altLang="zh-TW" smtClean="0"/>
+              <a:rPr lang="en-US" altLang="zh-TW"/>
               <a:t>Edit Master text styles</a:t>
             </a:r>
           </a:p>
           <a:p>
             <a:pPr lvl="1"/>
             <a:r>
-              <a:rPr lang="en-US" altLang="zh-TW" smtClean="0"/>
+              <a:rPr lang="en-US" altLang="zh-TW"/>
               <a:t>Second level</a:t>
             </a:r>
           </a:p>
           <a:p>
             <a:pPr lvl="2"/>
             <a:r>
-              <a:rPr lang="en-US" altLang="zh-TW" smtClean="0"/>
+              <a:rPr lang="en-US" altLang="zh-TW"/>
               <a:t>Third level</a:t>
             </a:r>
           </a:p>
           <a:p>
             <a:pPr lvl="3"/>
             <a:r>
-              <a:rPr lang="en-US" altLang="zh-TW" smtClean="0"/>
+              <a:rPr lang="en-US" altLang="zh-TW"/>
               <a:t>Fourth level</a:t>
             </a:r>
           </a:p>
           <a:p>
             <a:pPr lvl="4"/>
             <a:r>
-              <a:rPr lang="en-US" altLang="zh-TW" smtClean="0"/>
+              <a:rPr lang="en-US" altLang="zh-TW"/>
               <a:t>Fifth level</a:t>
             </a:r>
             <a:endParaRPr lang="zh-TW" altLang="en-US"/>
@@ -1307,35 +1312,35 @@
           <a:p>
             <a:pPr lvl="0"/>
             <a:r>
-              <a:rPr lang="en-US" altLang="zh-TW" smtClean="0"/>
+              <a:rPr lang="en-US" altLang="zh-TW"/>
               <a:t>Edit Master text styles</a:t>
             </a:r>
           </a:p>
           <a:p>
             <a:pPr lvl="1"/>
             <a:r>
-              <a:rPr lang="en-US" altLang="zh-TW" smtClean="0"/>
+              <a:rPr lang="en-US" altLang="zh-TW"/>
               <a:t>Second level</a:t>
             </a:r>
           </a:p>
           <a:p>
             <a:pPr lvl="2"/>
             <a:r>
-              <a:rPr lang="en-US" altLang="zh-TW" smtClean="0"/>
+              <a:rPr lang="en-US" altLang="zh-TW"/>
               <a:t>Third level</a:t>
             </a:r>
           </a:p>
           <a:p>
             <a:pPr lvl="3"/>
             <a:r>
-              <a:rPr lang="en-US" altLang="zh-TW" smtClean="0"/>
+              <a:rPr lang="en-US" altLang="zh-TW"/>
               <a:t>Fourth level</a:t>
             </a:r>
           </a:p>
           <a:p>
             <a:pPr lvl="4"/>
             <a:r>
-              <a:rPr lang="en-US" altLang="zh-TW" smtClean="0"/>
+              <a:rPr lang="en-US" altLang="zh-TW"/>
               <a:t>Fifth level</a:t>
             </a:r>
             <a:endParaRPr lang="zh-TW" altLang="en-US"/>
@@ -1359,7 +1364,7 @@
           <a:p>
             <a:fld id="{E8040ED9-C24F-4461-8242-555DFFCA2203}" type="datetimeFigureOut">
               <a:rPr lang="vi-VN" smtClean="0"/>
-              <a:t>23/03/2022</a:t>
+              <a:t>05/05/2024</a:t>
             </a:fld>
             <a:endParaRPr lang="vi-VN"/>
           </a:p>
@@ -1457,7 +1462,7 @@
           </a:lstStyle>
           <a:p>
             <a:r>
-              <a:rPr lang="en-US" altLang="zh-TW" smtClean="0"/>
+              <a:rPr lang="en-US" altLang="zh-TW"/>
               <a:t>Click to edit Master title style</a:t>
             </a:r>
             <a:endParaRPr lang="zh-TW" altLang="en-US"/>
@@ -1523,7 +1528,7 @@
           <a:p>
             <a:pPr lvl="0"/>
             <a:r>
-              <a:rPr lang="en-US" altLang="zh-TW" smtClean="0"/>
+              <a:rPr lang="en-US" altLang="zh-TW"/>
               <a:t>Edit Master text styles</a:t>
             </a:r>
           </a:p>
@@ -1579,35 +1584,35 @@
           <a:p>
             <a:pPr lvl="0"/>
             <a:r>
-              <a:rPr lang="en-US" altLang="zh-TW" smtClean="0"/>
+              <a:rPr lang="en-US" altLang="zh-TW"/>
               <a:t>Edit Master text styles</a:t>
             </a:r>
           </a:p>
           <a:p>
             <a:pPr lvl="1"/>
             <a:r>
-              <a:rPr lang="en-US" altLang="zh-TW" smtClean="0"/>
+              <a:rPr lang="en-US" altLang="zh-TW"/>
               <a:t>Second level</a:t>
             </a:r>
           </a:p>
           <a:p>
             <a:pPr lvl="2"/>
             <a:r>
-              <a:rPr lang="en-US" altLang="zh-TW" smtClean="0"/>
+              <a:rPr lang="en-US" altLang="zh-TW"/>
               <a:t>Third level</a:t>
             </a:r>
           </a:p>
           <a:p>
             <a:pPr lvl="3"/>
             <a:r>
-              <a:rPr lang="en-US" altLang="zh-TW" smtClean="0"/>
+              <a:rPr lang="en-US" altLang="zh-TW"/>
               <a:t>Fourth level</a:t>
             </a:r>
           </a:p>
           <a:p>
             <a:pPr lvl="4"/>
             <a:r>
-              <a:rPr lang="en-US" altLang="zh-TW" smtClean="0"/>
+              <a:rPr lang="en-US" altLang="zh-TW"/>
               <a:t>Fifth level</a:t>
             </a:r>
             <a:endParaRPr lang="zh-TW" altLang="en-US"/>
@@ -1673,7 +1678,7 @@
           <a:p>
             <a:pPr lvl="0"/>
             <a:r>
-              <a:rPr lang="en-US" altLang="zh-TW" smtClean="0"/>
+              <a:rPr lang="en-US" altLang="zh-TW"/>
               <a:t>Edit Master text styles</a:t>
             </a:r>
           </a:p>
@@ -1729,35 +1734,35 @@
           <a:p>
             <a:pPr lvl="0"/>
             <a:r>
-              <a:rPr lang="en-US" altLang="zh-TW" smtClean="0"/>
+              <a:rPr lang="en-US" altLang="zh-TW"/>
               <a:t>Edit Master text styles</a:t>
             </a:r>
           </a:p>
           <a:p>
             <a:pPr lvl="1"/>
             <a:r>
-              <a:rPr lang="en-US" altLang="zh-TW" smtClean="0"/>
+              <a:rPr lang="en-US" altLang="zh-TW"/>
               <a:t>Second level</a:t>
             </a:r>
           </a:p>
           <a:p>
             <a:pPr lvl="2"/>
             <a:r>
-              <a:rPr lang="en-US" altLang="zh-TW" smtClean="0"/>
+              <a:rPr lang="en-US" altLang="zh-TW"/>
               <a:t>Third level</a:t>
             </a:r>
           </a:p>
           <a:p>
             <a:pPr lvl="3"/>
             <a:r>
-              <a:rPr lang="en-US" altLang="zh-TW" smtClean="0"/>
+              <a:rPr lang="en-US" altLang="zh-TW"/>
               <a:t>Fourth level</a:t>
             </a:r>
           </a:p>
           <a:p>
             <a:pPr lvl="4"/>
             <a:r>
-              <a:rPr lang="en-US" altLang="zh-TW" smtClean="0"/>
+              <a:rPr lang="en-US" altLang="zh-TW"/>
               <a:t>Fifth level</a:t>
             </a:r>
             <a:endParaRPr lang="zh-TW" altLang="en-US"/>
@@ -1781,7 +1786,7 @@
           <a:p>
             <a:fld id="{E8040ED9-C24F-4461-8242-555DFFCA2203}" type="datetimeFigureOut">
               <a:rPr lang="vi-VN" smtClean="0"/>
-              <a:t>23/03/2022</a:t>
+              <a:t>05/05/2024</a:t>
             </a:fld>
             <a:endParaRPr lang="vi-VN"/>
           </a:p>
@@ -1875,7 +1880,7 @@
           <a:lstStyle/>
           <a:p>
             <a:r>
-              <a:rPr lang="en-US" altLang="zh-TW" smtClean="0"/>
+              <a:rPr lang="en-US" altLang="zh-TW"/>
               <a:t>Click to edit Master title style</a:t>
             </a:r>
             <a:endParaRPr lang="zh-TW" altLang="en-US"/>
@@ -1899,7 +1904,7 @@
           <a:p>
             <a:fld id="{E8040ED9-C24F-4461-8242-555DFFCA2203}" type="datetimeFigureOut">
               <a:rPr lang="vi-VN" smtClean="0"/>
-              <a:t>23/03/2022</a:t>
+              <a:t>05/05/2024</a:t>
             </a:fld>
             <a:endParaRPr lang="vi-VN"/>
           </a:p>
@@ -1994,7 +1999,7 @@
           <a:p>
             <a:fld id="{E8040ED9-C24F-4461-8242-555DFFCA2203}" type="datetimeFigureOut">
               <a:rPr lang="vi-VN" smtClean="0"/>
-              <a:t>23/03/2022</a:t>
+              <a:t>05/05/2024</a:t>
             </a:fld>
             <a:endParaRPr lang="vi-VN"/>
           </a:p>
@@ -2097,7 +2102,7 @@
           </a:lstStyle>
           <a:p>
             <a:r>
-              <a:rPr lang="en-US" altLang="zh-TW" smtClean="0"/>
+              <a:rPr lang="en-US" altLang="zh-TW"/>
               <a:t>Click to edit Master title style</a:t>
             </a:r>
             <a:endParaRPr lang="zh-TW" altLang="en-US"/>
@@ -2154,35 +2159,35 @@
           <a:p>
             <a:pPr lvl="0"/>
             <a:r>
-              <a:rPr lang="en-US" altLang="zh-TW" smtClean="0"/>
+              <a:rPr lang="en-US" altLang="zh-TW"/>
               <a:t>Edit Master text styles</a:t>
             </a:r>
           </a:p>
           <a:p>
             <a:pPr lvl="1"/>
             <a:r>
-              <a:rPr lang="en-US" altLang="zh-TW" smtClean="0"/>
+              <a:rPr lang="en-US" altLang="zh-TW"/>
               <a:t>Second level</a:t>
             </a:r>
           </a:p>
           <a:p>
             <a:pPr lvl="2"/>
             <a:r>
-              <a:rPr lang="en-US" altLang="zh-TW" smtClean="0"/>
+              <a:rPr lang="en-US" altLang="zh-TW"/>
               <a:t>Third level</a:t>
             </a:r>
           </a:p>
           <a:p>
             <a:pPr lvl="3"/>
             <a:r>
-              <a:rPr lang="en-US" altLang="zh-TW" smtClean="0"/>
+              <a:rPr lang="en-US" altLang="zh-TW"/>
               <a:t>Fourth level</a:t>
             </a:r>
           </a:p>
           <a:p>
             <a:pPr lvl="4"/>
             <a:r>
-              <a:rPr lang="en-US" altLang="zh-TW" smtClean="0"/>
+              <a:rPr lang="en-US" altLang="zh-TW"/>
               <a:t>Fifth level</a:t>
             </a:r>
             <a:endParaRPr lang="zh-TW" altLang="en-US"/>
@@ -2248,7 +2253,7 @@
           <a:p>
             <a:pPr lvl="0"/>
             <a:r>
-              <a:rPr lang="en-US" altLang="zh-TW" smtClean="0"/>
+              <a:rPr lang="en-US" altLang="zh-TW"/>
               <a:t>Edit Master text styles</a:t>
             </a:r>
           </a:p>
@@ -2271,7 +2276,7 @@
           <a:p>
             <a:fld id="{E8040ED9-C24F-4461-8242-555DFFCA2203}" type="datetimeFigureOut">
               <a:rPr lang="vi-VN" smtClean="0"/>
-              <a:t>23/03/2022</a:t>
+              <a:t>05/05/2024</a:t>
             </a:fld>
             <a:endParaRPr lang="vi-VN"/>
           </a:p>
@@ -2374,7 +2379,7 @@
           </a:lstStyle>
           <a:p>
             <a:r>
-              <a:rPr lang="en-US" altLang="zh-TW" smtClean="0"/>
+              <a:rPr lang="en-US" altLang="zh-TW"/>
               <a:t>Click to edit Master title style</a:t>
             </a:r>
             <a:endParaRPr lang="zh-TW" altLang="en-US"/>
@@ -2439,7 +2444,7 @@
           </a:lstStyle>
           <a:p>
             <a:r>
-              <a:rPr lang="en-US" altLang="zh-TW" smtClean="0"/>
+              <a:rPr lang="en-US" altLang="zh-TW"/>
               <a:t>Click icon to add picture</a:t>
             </a:r>
             <a:endParaRPr lang="zh-TW" altLang="en-US"/>
@@ -2505,7 +2510,7 @@
           <a:p>
             <a:pPr lvl="0"/>
             <a:r>
-              <a:rPr lang="en-US" altLang="zh-TW" smtClean="0"/>
+              <a:rPr lang="en-US" altLang="zh-TW"/>
               <a:t>Edit Master text styles</a:t>
             </a:r>
           </a:p>
@@ -2528,7 +2533,7 @@
           <a:p>
             <a:fld id="{E8040ED9-C24F-4461-8242-555DFFCA2203}" type="datetimeFigureOut">
               <a:rPr lang="vi-VN" smtClean="0"/>
-              <a:t>23/03/2022</a:t>
+              <a:t>05/05/2024</a:t>
             </a:fld>
             <a:endParaRPr lang="vi-VN"/>
           </a:p>
@@ -2642,10 +2647,9 @@
           <a:lstStyle/>
           <a:p>
             <a:r>
-              <a:rPr lang="zh-TW" altLang="en-US" smtClean="0"/>
+              <a:rPr lang="zh-TW" altLang="en-US"/>
               <a:t>按一下以編輯母片標題樣式</a:t>
             </a:r>
-            <a:endParaRPr lang="zh-TW" altLang="en-US"/>
           </a:p>
         </p:txBody>
       </p:sp>
@@ -2676,38 +2680,37 @@
           <a:p>
             <a:pPr lvl="0"/>
             <a:r>
-              <a:rPr lang="zh-TW" altLang="en-US" smtClean="0"/>
+              <a:rPr lang="zh-TW" altLang="en-US"/>
               <a:t>按一下以編輯母片文字樣式</a:t>
             </a:r>
           </a:p>
           <a:p>
             <a:pPr lvl="1"/>
             <a:r>
-              <a:rPr lang="zh-TW" altLang="en-US" smtClean="0"/>
+              <a:rPr lang="zh-TW" altLang="en-US"/>
               <a:t>第二層</a:t>
             </a:r>
           </a:p>
           <a:p>
             <a:pPr lvl="2"/>
             <a:r>
-              <a:rPr lang="zh-TW" altLang="en-US" smtClean="0"/>
+              <a:rPr lang="zh-TW" altLang="en-US"/>
               <a:t>第三層</a:t>
             </a:r>
           </a:p>
           <a:p>
             <a:pPr lvl="3"/>
             <a:r>
-              <a:rPr lang="zh-TW" altLang="en-US" smtClean="0"/>
+              <a:rPr lang="zh-TW" altLang="en-US"/>
               <a:t>第四層</a:t>
             </a:r>
           </a:p>
           <a:p>
             <a:pPr lvl="4"/>
             <a:r>
-              <a:rPr lang="zh-TW" altLang="en-US" smtClean="0"/>
+              <a:rPr lang="zh-TW" altLang="en-US"/>
               <a:t>第五層</a:t>
             </a:r>
-            <a:endParaRPr lang="zh-TW" altLang="en-US"/>
           </a:p>
         </p:txBody>
       </p:sp>
@@ -2746,7 +2749,7 @@
           <a:p>
             <a:fld id="{E8040ED9-C24F-4461-8242-555DFFCA2203}" type="datetimeFigureOut">
               <a:rPr lang="vi-VN" smtClean="0"/>
-              <a:t>23/03/2022</a:t>
+              <a:t>05/05/2024</a:t>
             </a:fld>
             <a:endParaRPr lang="vi-VN"/>
           </a:p>
@@ -3144,7 +3147,7 @@
           <a:lstStyle/>
           <a:p>
             <a:r>
-              <a:rPr lang="zh-TW" altLang="en-US" sz="7200" b="1" i="1" dirty="0" smtClean="0">
+              <a:rPr lang="zh-TW" altLang="en-US" sz="7200" b="1" i="1" dirty="0">
                 <a:solidFill>
                   <a:srgbClr val="660033"/>
                 </a:solidFill>
@@ -3158,24 +3161,7 @@
                 <a:latin typeface="微軟正黑體" pitchFamily="34" charset="-120"/>
                 <a:ea typeface="微軟正黑體" pitchFamily="34" charset="-120"/>
               </a:rPr>
-              <a:t>主</a:t>
-            </a:r>
-            <a:r>
-              <a:rPr lang="zh-TW" altLang="en-US" sz="7200" b="1" i="1" dirty="0">
-                <a:solidFill>
-                  <a:srgbClr val="660033"/>
-                </a:solidFill>
-                <a:effectLst>
-                  <a:outerShdw blurRad="38100" dist="38100" dir="2700000" algn="tl">
-                    <a:srgbClr val="000000">
-                      <a:alpha val="43137"/>
-                    </a:srgbClr>
-                  </a:outerShdw>
-                </a:effectLst>
-                <a:latin typeface="微軟正黑體" pitchFamily="34" charset="-120"/>
-                <a:ea typeface="微軟正黑體" pitchFamily="34" charset="-120"/>
-              </a:rPr>
-              <a:t>禱文</a:t>
+              <a:t>主禱文</a:t>
             </a:r>
           </a:p>
         </p:txBody>
@@ -3286,7 +3272,7 @@
         <p:spPr>
           <a:xfrm>
             <a:off x="0" y="5158596"/>
-            <a:ext cx="12192000" cy="769441"/>
+            <a:ext cx="12192000" cy="584775"/>
           </a:xfrm>
           <a:prstGeom prst="rect">
             <a:avLst/>
@@ -3301,25 +3287,40 @@
           <a:p>
             <a:pPr algn="ctr"/>
             <a:r>
-              <a:rPr lang="en-US" sz="4400" b="1" dirty="0" smtClean="0">
-                <a:solidFill>
-                  <a:srgbClr val="660033"/>
-                </a:solidFill>
-              </a:rPr>
-              <a:t>( Verse 2 </a:t>
-            </a:r>
-            <a:r>
-              <a:rPr lang="en-US" sz="4400" b="1" dirty="0">
-                <a:solidFill>
-                  <a:srgbClr val="660033"/>
-                </a:solidFill>
-              </a:rPr>
-              <a:t>)</a:t>
-            </a:r>
-            <a:endParaRPr lang="vi-VN" sz="4400" b="1" dirty="0">
+              <a:rPr lang="en-US" sz="3200" b="1" dirty="0">
+                <a:solidFill>
+                  <a:srgbClr val="660033"/>
+                </a:solidFill>
+                <a:latin typeface="Microsoft JhengHei" panose="020B0604030504040204" pitchFamily="34" charset="-120"/>
+                <a:ea typeface="Microsoft JhengHei" panose="020B0604030504040204" pitchFamily="34" charset="-120"/>
+              </a:rPr>
+              <a:t>( </a:t>
+            </a:r>
+            <a:r>
+              <a:rPr lang="zh-CN" altLang="en-US" sz="3200" b="1" dirty="0">
+                <a:solidFill>
+                  <a:srgbClr val="660033"/>
+                </a:solidFill>
+                <a:latin typeface="Microsoft JhengHei" panose="020B0604030504040204" pitchFamily="34" charset="-120"/>
+                <a:ea typeface="Microsoft JhengHei" panose="020B0604030504040204" pitchFamily="34" charset="-120"/>
+              </a:rPr>
+              <a:t>正歌</a:t>
+            </a:r>
+            <a:r>
+              <a:rPr lang="en-US" sz="3200" b="1" dirty="0">
+                <a:solidFill>
+                  <a:srgbClr val="660033"/>
+                </a:solidFill>
+                <a:latin typeface="Microsoft JhengHei" panose="020B0604030504040204" pitchFamily="34" charset="-120"/>
+                <a:ea typeface="Microsoft JhengHei" panose="020B0604030504040204" pitchFamily="34" charset="-120"/>
+              </a:rPr>
+              <a:t> 2 )</a:t>
+            </a:r>
+            <a:endParaRPr lang="vi-VN" sz="3200" b="1" dirty="0">
               <a:solidFill>
                 <a:srgbClr val="660033"/>
               </a:solidFill>
+              <a:ea typeface="Microsoft JhengHei" panose="020B0604030504040204" pitchFamily="34" charset="-120"/>
             </a:endParaRPr>
           </a:p>
         </p:txBody>
@@ -3387,17 +3388,7 @@
                 <a:latin typeface="微軟正黑體" pitchFamily="34" charset="-120"/>
                 <a:ea typeface="微軟正黑體" pitchFamily="34" charset="-120"/>
               </a:rPr>
-              <a:t>王的旨</a:t>
-            </a:r>
-            <a:r>
-              <a:rPr lang="zh-TW" altLang="en-US" sz="6400" b="1" dirty="0">
-                <a:solidFill>
-                  <a:srgbClr val="660033"/>
-                </a:solidFill>
-                <a:latin typeface="微軟正黑體" pitchFamily="34" charset="-120"/>
-                <a:ea typeface="微軟正黑體" pitchFamily="34" charset="-120"/>
-              </a:rPr>
-              <a:t>意</a:t>
+              <a:t>王的旨意</a:t>
             </a:r>
             <a:endParaRPr lang="en-US" altLang="zh-TW" sz="6400" b="1" dirty="0">
               <a:solidFill>
@@ -3419,17 +3410,7 @@
                 <a:latin typeface="微軟正黑體" pitchFamily="34" charset="-120"/>
                 <a:ea typeface="微軟正黑體" pitchFamily="34" charset="-120"/>
               </a:rPr>
-              <a:t>如</a:t>
-            </a:r>
-            <a:r>
-              <a:rPr lang="zh-TW" altLang="en-US" sz="6400" b="1" dirty="0">
-                <a:solidFill>
-                  <a:srgbClr val="660033"/>
-                </a:solidFill>
-                <a:latin typeface="微軟正黑體" pitchFamily="34" charset="-120"/>
-                <a:ea typeface="微軟正黑體" pitchFamily="34" charset="-120"/>
-              </a:rPr>
-              <a:t>陽光遍地彰顯</a:t>
+              <a:t>如陽光遍地彰顯</a:t>
             </a:r>
             <a:endParaRPr lang="en-US" altLang="zh-TW" sz="6400" b="1" dirty="0">
               <a:solidFill>
@@ -3450,7 +3431,7 @@
         <p:spPr>
           <a:xfrm>
             <a:off x="0" y="5158596"/>
-            <a:ext cx="12192000" cy="769441"/>
+            <a:ext cx="12192000" cy="584775"/>
           </a:xfrm>
           <a:prstGeom prst="rect">
             <a:avLst/>
@@ -3465,25 +3446,40 @@
           <a:p>
             <a:pPr algn="ctr"/>
             <a:r>
-              <a:rPr lang="en-US" sz="4400" b="1" dirty="0" smtClean="0">
-                <a:solidFill>
-                  <a:srgbClr val="660033"/>
-                </a:solidFill>
-              </a:rPr>
-              <a:t>( Verse 2 </a:t>
-            </a:r>
-            <a:r>
-              <a:rPr lang="en-US" sz="4400" b="1" dirty="0">
-                <a:solidFill>
-                  <a:srgbClr val="660033"/>
-                </a:solidFill>
-              </a:rPr>
-              <a:t>)</a:t>
-            </a:r>
-            <a:endParaRPr lang="vi-VN" sz="4400" b="1" dirty="0">
+              <a:rPr lang="en-US" sz="3200" b="1" dirty="0">
+                <a:solidFill>
+                  <a:srgbClr val="660033"/>
+                </a:solidFill>
+                <a:latin typeface="Microsoft JhengHei" panose="020B0604030504040204" pitchFamily="34" charset="-120"/>
+                <a:ea typeface="Microsoft JhengHei" panose="020B0604030504040204" pitchFamily="34" charset="-120"/>
+              </a:rPr>
+              <a:t>( </a:t>
+            </a:r>
+            <a:r>
+              <a:rPr lang="zh-CN" altLang="en-US" sz="3200" b="1" dirty="0">
+                <a:solidFill>
+                  <a:srgbClr val="660033"/>
+                </a:solidFill>
+                <a:latin typeface="Microsoft JhengHei" panose="020B0604030504040204" pitchFamily="34" charset="-120"/>
+                <a:ea typeface="Microsoft JhengHei" panose="020B0604030504040204" pitchFamily="34" charset="-120"/>
+              </a:rPr>
+              <a:t>正歌</a:t>
+            </a:r>
+            <a:r>
+              <a:rPr lang="en-US" sz="3200" b="1" dirty="0">
+                <a:solidFill>
+                  <a:srgbClr val="660033"/>
+                </a:solidFill>
+                <a:latin typeface="Microsoft JhengHei" panose="020B0604030504040204" pitchFamily="34" charset="-120"/>
+                <a:ea typeface="Microsoft JhengHei" panose="020B0604030504040204" pitchFamily="34" charset="-120"/>
+              </a:rPr>
+              <a:t> 2 )</a:t>
+            </a:r>
+            <a:endParaRPr lang="vi-VN" sz="3200" b="1" dirty="0">
               <a:solidFill>
                 <a:srgbClr val="660033"/>
               </a:solidFill>
+              <a:ea typeface="Microsoft JhengHei" panose="020B0604030504040204" pitchFamily="34" charset="-120"/>
             </a:endParaRPr>
           </a:p>
         </p:txBody>
@@ -3594,7 +3590,7 @@
         <p:spPr>
           <a:xfrm>
             <a:off x="0" y="5158596"/>
-            <a:ext cx="12192000" cy="769441"/>
+            <a:ext cx="12192000" cy="584775"/>
           </a:xfrm>
           <a:prstGeom prst="rect">
             <a:avLst/>
@@ -3609,25 +3605,40 @@
           <a:p>
             <a:pPr algn="ctr"/>
             <a:r>
-              <a:rPr lang="en-US" sz="4400" b="1" dirty="0" smtClean="0">
-                <a:solidFill>
-                  <a:srgbClr val="660033"/>
-                </a:solidFill>
-              </a:rPr>
-              <a:t>( Chorus </a:t>
-            </a:r>
-            <a:r>
-              <a:rPr lang="en-US" sz="4400" b="1" dirty="0">
-                <a:solidFill>
-                  <a:srgbClr val="660033"/>
-                </a:solidFill>
-              </a:rPr>
-              <a:t>)</a:t>
-            </a:r>
-            <a:endParaRPr lang="vi-VN" sz="4400" b="1" dirty="0">
+              <a:rPr lang="en-US" sz="3200" b="1" dirty="0">
+                <a:solidFill>
+                  <a:srgbClr val="660033"/>
+                </a:solidFill>
+                <a:latin typeface="Microsoft JhengHei" panose="020B0604030504040204" pitchFamily="34" charset="-120"/>
+                <a:ea typeface="Microsoft JhengHei" panose="020B0604030504040204" pitchFamily="34" charset="-120"/>
+              </a:rPr>
+              <a:t>( </a:t>
+            </a:r>
+            <a:r>
+              <a:rPr lang="zh-CN" altLang="en-US" sz="3200" b="1" dirty="0">
+                <a:solidFill>
+                  <a:srgbClr val="660033"/>
+                </a:solidFill>
+                <a:latin typeface="Microsoft JhengHei" panose="020B0604030504040204" pitchFamily="34" charset="-120"/>
+                <a:ea typeface="Microsoft JhengHei" panose="020B0604030504040204" pitchFamily="34" charset="-120"/>
+              </a:rPr>
+              <a:t>副歌</a:t>
+            </a:r>
+            <a:r>
+              <a:rPr lang="en-US" sz="3200" b="1" dirty="0">
+                <a:solidFill>
+                  <a:srgbClr val="660033"/>
+                </a:solidFill>
+                <a:latin typeface="Microsoft JhengHei" panose="020B0604030504040204" pitchFamily="34" charset="-120"/>
+                <a:ea typeface="Microsoft JhengHei" panose="020B0604030504040204" pitchFamily="34" charset="-120"/>
+              </a:rPr>
+              <a:t> )</a:t>
+            </a:r>
+            <a:endParaRPr lang="vi-VN" sz="3200" b="1" dirty="0">
               <a:solidFill>
                 <a:srgbClr val="660033"/>
               </a:solidFill>
+              <a:ea typeface="Microsoft JhengHei" panose="020B0604030504040204" pitchFamily="34" charset="-120"/>
             </a:endParaRPr>
           </a:p>
         </p:txBody>
@@ -3738,7 +3749,7 @@
         <p:spPr>
           <a:xfrm>
             <a:off x="0" y="5158596"/>
-            <a:ext cx="12192000" cy="769441"/>
+            <a:ext cx="12192000" cy="584775"/>
           </a:xfrm>
           <a:prstGeom prst="rect">
             <a:avLst/>
@@ -3753,25 +3764,40 @@
           <a:p>
             <a:pPr algn="ctr"/>
             <a:r>
-              <a:rPr lang="en-US" sz="4400" b="1" dirty="0" smtClean="0">
-                <a:solidFill>
-                  <a:srgbClr val="660033"/>
-                </a:solidFill>
-              </a:rPr>
-              <a:t>( Chorus </a:t>
-            </a:r>
-            <a:r>
-              <a:rPr lang="en-US" sz="4400" b="1" dirty="0">
-                <a:solidFill>
-                  <a:srgbClr val="660033"/>
-                </a:solidFill>
-              </a:rPr>
-              <a:t>)</a:t>
-            </a:r>
-            <a:endParaRPr lang="vi-VN" sz="4400" b="1" dirty="0">
+              <a:rPr lang="en-US" sz="3200" b="1" dirty="0">
+                <a:solidFill>
+                  <a:srgbClr val="660033"/>
+                </a:solidFill>
+                <a:latin typeface="Microsoft JhengHei" panose="020B0604030504040204" pitchFamily="34" charset="-120"/>
+                <a:ea typeface="Microsoft JhengHei" panose="020B0604030504040204" pitchFamily="34" charset="-120"/>
+              </a:rPr>
+              <a:t>( </a:t>
+            </a:r>
+            <a:r>
+              <a:rPr lang="zh-CN" altLang="en-US" sz="3200" b="1" dirty="0">
+                <a:solidFill>
+                  <a:srgbClr val="660033"/>
+                </a:solidFill>
+                <a:latin typeface="Microsoft JhengHei" panose="020B0604030504040204" pitchFamily="34" charset="-120"/>
+                <a:ea typeface="Microsoft JhengHei" panose="020B0604030504040204" pitchFamily="34" charset="-120"/>
+              </a:rPr>
+              <a:t>副歌</a:t>
+            </a:r>
+            <a:r>
+              <a:rPr lang="en-US" sz="3200" b="1" dirty="0">
+                <a:solidFill>
+                  <a:srgbClr val="660033"/>
+                </a:solidFill>
+                <a:latin typeface="Microsoft JhengHei" panose="020B0604030504040204" pitchFamily="34" charset="-120"/>
+                <a:ea typeface="Microsoft JhengHei" panose="020B0604030504040204" pitchFamily="34" charset="-120"/>
+              </a:rPr>
+              <a:t> )</a:t>
+            </a:r>
+            <a:endParaRPr lang="vi-VN" sz="3200" b="1" dirty="0">
               <a:solidFill>
                 <a:srgbClr val="660033"/>
               </a:solidFill>
+              <a:ea typeface="Microsoft JhengHei" panose="020B0604030504040204" pitchFamily="34" charset="-120"/>
             </a:endParaRPr>
           </a:p>
         </p:txBody>
@@ -3882,7 +3908,7 @@
         <p:spPr>
           <a:xfrm>
             <a:off x="0" y="5158596"/>
-            <a:ext cx="12192000" cy="769441"/>
+            <a:ext cx="12192000" cy="584775"/>
           </a:xfrm>
           <a:prstGeom prst="rect">
             <a:avLst/>
@@ -3897,25 +3923,40 @@
           <a:p>
             <a:pPr algn="ctr"/>
             <a:r>
-              <a:rPr lang="en-US" sz="4400" b="1" dirty="0" smtClean="0">
-                <a:solidFill>
-                  <a:srgbClr val="660033"/>
-                </a:solidFill>
-              </a:rPr>
-              <a:t>( Chorus </a:t>
-            </a:r>
-            <a:r>
-              <a:rPr lang="en-US" sz="4400" b="1" dirty="0">
-                <a:solidFill>
-                  <a:srgbClr val="660033"/>
-                </a:solidFill>
-              </a:rPr>
-              <a:t>)</a:t>
-            </a:r>
-            <a:endParaRPr lang="vi-VN" sz="4400" b="1" dirty="0">
+              <a:rPr lang="en-US" sz="3200" b="1" dirty="0">
+                <a:solidFill>
+                  <a:srgbClr val="660033"/>
+                </a:solidFill>
+                <a:latin typeface="Microsoft JhengHei" panose="020B0604030504040204" pitchFamily="34" charset="-120"/>
+                <a:ea typeface="Microsoft JhengHei" panose="020B0604030504040204" pitchFamily="34" charset="-120"/>
+              </a:rPr>
+              <a:t>( </a:t>
+            </a:r>
+            <a:r>
+              <a:rPr lang="zh-CN" altLang="en-US" sz="3200" b="1" dirty="0">
+                <a:solidFill>
+                  <a:srgbClr val="660033"/>
+                </a:solidFill>
+                <a:latin typeface="Microsoft JhengHei" panose="020B0604030504040204" pitchFamily="34" charset="-120"/>
+                <a:ea typeface="Microsoft JhengHei" panose="020B0604030504040204" pitchFamily="34" charset="-120"/>
+              </a:rPr>
+              <a:t>副歌</a:t>
+            </a:r>
+            <a:r>
+              <a:rPr lang="en-US" sz="3200" b="1" dirty="0">
+                <a:solidFill>
+                  <a:srgbClr val="660033"/>
+                </a:solidFill>
+                <a:latin typeface="Microsoft JhengHei" panose="020B0604030504040204" pitchFamily="34" charset="-120"/>
+                <a:ea typeface="Microsoft JhengHei" panose="020B0604030504040204" pitchFamily="34" charset="-120"/>
+              </a:rPr>
+              <a:t> )</a:t>
+            </a:r>
+            <a:endParaRPr lang="vi-VN" sz="3200" b="1" dirty="0">
               <a:solidFill>
                 <a:srgbClr val="660033"/>
               </a:solidFill>
+              <a:ea typeface="Microsoft JhengHei" panose="020B0604030504040204" pitchFamily="34" charset="-120"/>
             </a:endParaRPr>
           </a:p>
         </p:txBody>
@@ -4026,7 +4067,7 @@
         <p:spPr>
           <a:xfrm>
             <a:off x="0" y="5158596"/>
-            <a:ext cx="12192000" cy="769441"/>
+            <a:ext cx="12192000" cy="584775"/>
           </a:xfrm>
           <a:prstGeom prst="rect">
             <a:avLst/>
@@ -4041,25 +4082,40 @@
           <a:p>
             <a:pPr algn="ctr"/>
             <a:r>
-              <a:rPr lang="en-US" sz="4400" b="1" dirty="0" smtClean="0">
-                <a:solidFill>
-                  <a:srgbClr val="660033"/>
-                </a:solidFill>
-              </a:rPr>
-              <a:t>( Chorus </a:t>
-            </a:r>
-            <a:r>
-              <a:rPr lang="en-US" sz="4400" b="1" dirty="0">
-                <a:solidFill>
-                  <a:srgbClr val="660033"/>
-                </a:solidFill>
-              </a:rPr>
-              <a:t>)</a:t>
-            </a:r>
-            <a:endParaRPr lang="vi-VN" sz="4400" b="1" dirty="0">
+              <a:rPr lang="en-US" sz="3200" b="1" dirty="0">
+                <a:solidFill>
+                  <a:srgbClr val="660033"/>
+                </a:solidFill>
+                <a:latin typeface="Microsoft JhengHei" panose="020B0604030504040204" pitchFamily="34" charset="-120"/>
+                <a:ea typeface="Microsoft JhengHei" panose="020B0604030504040204" pitchFamily="34" charset="-120"/>
+              </a:rPr>
+              <a:t>( </a:t>
+            </a:r>
+            <a:r>
+              <a:rPr lang="zh-CN" altLang="en-US" sz="3200" b="1" dirty="0">
+                <a:solidFill>
+                  <a:srgbClr val="660033"/>
+                </a:solidFill>
+                <a:latin typeface="Microsoft JhengHei" panose="020B0604030504040204" pitchFamily="34" charset="-120"/>
+                <a:ea typeface="Microsoft JhengHei" panose="020B0604030504040204" pitchFamily="34" charset="-120"/>
+              </a:rPr>
+              <a:t>副歌</a:t>
+            </a:r>
+            <a:r>
+              <a:rPr lang="en-US" sz="3200" b="1" dirty="0">
+                <a:solidFill>
+                  <a:srgbClr val="660033"/>
+                </a:solidFill>
+                <a:latin typeface="Microsoft JhengHei" panose="020B0604030504040204" pitchFamily="34" charset="-120"/>
+                <a:ea typeface="Microsoft JhengHei" panose="020B0604030504040204" pitchFamily="34" charset="-120"/>
+              </a:rPr>
+              <a:t> )</a:t>
+            </a:r>
+            <a:endParaRPr lang="vi-VN" sz="3200" b="1" dirty="0">
               <a:solidFill>
                 <a:srgbClr val="660033"/>
               </a:solidFill>
+              <a:ea typeface="Microsoft JhengHei" panose="020B0604030504040204" pitchFamily="34" charset="-120"/>
             </a:endParaRPr>
           </a:p>
         </p:txBody>
@@ -4170,7 +4226,7 @@
         <p:spPr>
           <a:xfrm>
             <a:off x="0" y="5158596"/>
-            <a:ext cx="12192000" cy="769441"/>
+            <a:ext cx="12192000" cy="584775"/>
           </a:xfrm>
           <a:prstGeom prst="rect">
             <a:avLst/>
@@ -4185,41 +4241,40 @@
           <a:p>
             <a:pPr algn="ctr"/>
             <a:r>
-              <a:rPr lang="en-US" sz="4400" b="1" dirty="0" smtClean="0">
-                <a:solidFill>
-                  <a:srgbClr val="660033"/>
-                </a:solidFill>
+              <a:rPr lang="en-US" sz="3200" b="1" dirty="0">
+                <a:solidFill>
+                  <a:srgbClr val="660033"/>
+                </a:solidFill>
+                <a:latin typeface="Microsoft JhengHei" panose="020B0604030504040204" pitchFamily="34" charset="-120"/>
+                <a:ea typeface="Microsoft JhengHei" panose="020B0604030504040204" pitchFamily="34" charset="-120"/>
               </a:rPr>
               <a:t>( </a:t>
             </a:r>
             <a:r>
-              <a:rPr lang="en-US" altLang="zh-CN" sz="4400" b="1" dirty="0" smtClean="0">
-                <a:solidFill>
-                  <a:srgbClr val="660033"/>
-                </a:solidFill>
-              </a:rPr>
-              <a:t>Bridge</a:t>
-            </a:r>
-            <a:r>
-              <a:rPr lang="en-US" sz="4400" b="1" dirty="0" smtClean="0">
-                <a:solidFill>
-                  <a:srgbClr val="660033"/>
-                </a:solidFill>
-              </a:rPr>
-              <a:t> </a:t>
-            </a:r>
-            <a:r>
-              <a:rPr lang="en-US" sz="4400" b="1" dirty="0">
-                <a:solidFill>
-                  <a:srgbClr val="660033"/>
-                </a:solidFill>
-              </a:rPr>
-              <a:t>)</a:t>
-            </a:r>
-            <a:endParaRPr lang="vi-VN" sz="4400" b="1" dirty="0">
+              <a:rPr lang="zh-CN" altLang="en-US" sz="3200" b="1" dirty="0">
+                <a:solidFill>
+                  <a:srgbClr val="660033"/>
+                </a:solidFill>
+                <a:latin typeface="Microsoft JhengHei" panose="020B0604030504040204" pitchFamily="34" charset="-120"/>
+                <a:ea typeface="Microsoft JhengHei" panose="020B0604030504040204" pitchFamily="34" charset="-120"/>
+              </a:rPr>
+              <a:t>橋</a:t>
+            </a:r>
+            <a:r>
+              <a:rPr lang="en-US" sz="3200" b="1" dirty="0">
+                <a:solidFill>
+                  <a:srgbClr val="660033"/>
+                </a:solidFill>
+                <a:latin typeface="Microsoft JhengHei" panose="020B0604030504040204" pitchFamily="34" charset="-120"/>
+                <a:ea typeface="Microsoft JhengHei" panose="020B0604030504040204" pitchFamily="34" charset="-120"/>
+              </a:rPr>
+              <a:t> )</a:t>
+            </a:r>
+            <a:endParaRPr lang="vi-VN" sz="3200" b="1" dirty="0">
               <a:solidFill>
                 <a:srgbClr val="660033"/>
               </a:solidFill>
+              <a:ea typeface="Microsoft JhengHei" panose="020B0604030504040204" pitchFamily="34" charset="-120"/>
             </a:endParaRPr>
           </a:p>
         </p:txBody>
@@ -4330,7 +4385,7 @@
         <p:spPr>
           <a:xfrm>
             <a:off x="0" y="5158596"/>
-            <a:ext cx="12192000" cy="769441"/>
+            <a:ext cx="12192000" cy="584775"/>
           </a:xfrm>
           <a:prstGeom prst="rect">
             <a:avLst/>
@@ -4345,41 +4400,40 @@
           <a:p>
             <a:pPr algn="ctr"/>
             <a:r>
-              <a:rPr lang="en-US" sz="4400" b="1" dirty="0" smtClean="0">
-                <a:solidFill>
-                  <a:srgbClr val="660033"/>
-                </a:solidFill>
+              <a:rPr lang="en-US" sz="3200" b="1" dirty="0">
+                <a:solidFill>
+                  <a:srgbClr val="660033"/>
+                </a:solidFill>
+                <a:latin typeface="Microsoft JhengHei" panose="020B0604030504040204" pitchFamily="34" charset="-120"/>
+                <a:ea typeface="Microsoft JhengHei" panose="020B0604030504040204" pitchFamily="34" charset="-120"/>
               </a:rPr>
               <a:t>( </a:t>
             </a:r>
             <a:r>
-              <a:rPr lang="en-US" altLang="zh-CN" sz="4400" b="1" dirty="0" smtClean="0">
-                <a:solidFill>
-                  <a:srgbClr val="660033"/>
-                </a:solidFill>
-              </a:rPr>
-              <a:t>Bridge</a:t>
-            </a:r>
-            <a:r>
-              <a:rPr lang="en-US" sz="4400" b="1" dirty="0" smtClean="0">
-                <a:solidFill>
-                  <a:srgbClr val="660033"/>
-                </a:solidFill>
-              </a:rPr>
-              <a:t> </a:t>
-            </a:r>
-            <a:r>
-              <a:rPr lang="en-US" sz="4400" b="1" dirty="0">
-                <a:solidFill>
-                  <a:srgbClr val="660033"/>
-                </a:solidFill>
-              </a:rPr>
-              <a:t>)</a:t>
-            </a:r>
-            <a:endParaRPr lang="vi-VN" sz="4400" b="1" dirty="0">
+              <a:rPr lang="zh-CN" altLang="en-US" sz="3200" b="1" dirty="0">
+                <a:solidFill>
+                  <a:srgbClr val="660033"/>
+                </a:solidFill>
+                <a:latin typeface="Microsoft JhengHei" panose="020B0604030504040204" pitchFamily="34" charset="-120"/>
+                <a:ea typeface="Microsoft JhengHei" panose="020B0604030504040204" pitchFamily="34" charset="-120"/>
+              </a:rPr>
+              <a:t>橋</a:t>
+            </a:r>
+            <a:r>
+              <a:rPr lang="en-US" sz="3200" b="1" dirty="0">
+                <a:solidFill>
+                  <a:srgbClr val="660033"/>
+                </a:solidFill>
+                <a:latin typeface="Microsoft JhengHei" panose="020B0604030504040204" pitchFamily="34" charset="-120"/>
+                <a:ea typeface="Microsoft JhengHei" panose="020B0604030504040204" pitchFamily="34" charset="-120"/>
+              </a:rPr>
+              <a:t> )</a:t>
+            </a:r>
+            <a:endParaRPr lang="vi-VN" sz="3200" b="1" dirty="0">
               <a:solidFill>
                 <a:srgbClr val="660033"/>
               </a:solidFill>
+              <a:ea typeface="Microsoft JhengHei" panose="020B0604030504040204" pitchFamily="34" charset="-120"/>
             </a:endParaRPr>
           </a:p>
         </p:txBody>
@@ -4490,7 +4544,7 @@
         <p:spPr>
           <a:xfrm>
             <a:off x="0" y="5158596"/>
-            <a:ext cx="12192000" cy="769441"/>
+            <a:ext cx="12192000" cy="584775"/>
           </a:xfrm>
           <a:prstGeom prst="rect">
             <a:avLst/>
@@ -4505,41 +4559,40 @@
           <a:p>
             <a:pPr algn="ctr"/>
             <a:r>
-              <a:rPr lang="en-US" sz="4400" b="1" dirty="0" smtClean="0">
-                <a:solidFill>
-                  <a:srgbClr val="660033"/>
-                </a:solidFill>
+              <a:rPr lang="en-US" sz="3200" b="1" dirty="0">
+                <a:solidFill>
+                  <a:srgbClr val="660033"/>
+                </a:solidFill>
+                <a:latin typeface="Microsoft JhengHei" panose="020B0604030504040204" pitchFamily="34" charset="-120"/>
+                <a:ea typeface="Microsoft JhengHei" panose="020B0604030504040204" pitchFamily="34" charset="-120"/>
               </a:rPr>
               <a:t>( </a:t>
             </a:r>
             <a:r>
-              <a:rPr lang="en-US" altLang="zh-CN" sz="4400" b="1" dirty="0" smtClean="0">
-                <a:solidFill>
-                  <a:srgbClr val="660033"/>
-                </a:solidFill>
-              </a:rPr>
-              <a:t>Last</a:t>
-            </a:r>
-            <a:r>
-              <a:rPr lang="en-US" sz="4400" b="1" dirty="0" smtClean="0">
-                <a:solidFill>
-                  <a:srgbClr val="660033"/>
-                </a:solidFill>
-              </a:rPr>
-              <a:t> </a:t>
-            </a:r>
-            <a:r>
-              <a:rPr lang="en-US" sz="4400" b="1" dirty="0">
-                <a:solidFill>
-                  <a:srgbClr val="660033"/>
-                </a:solidFill>
-              </a:rPr>
-              <a:t>)</a:t>
-            </a:r>
-            <a:endParaRPr lang="vi-VN" sz="4400" b="1" dirty="0">
+              <a:rPr lang="zh-CN" altLang="en-US" sz="3200" b="1" dirty="0">
+                <a:solidFill>
+                  <a:srgbClr val="660033"/>
+                </a:solidFill>
+                <a:latin typeface="Microsoft JhengHei" panose="020B0604030504040204" pitchFamily="34" charset="-120"/>
+                <a:ea typeface="Microsoft JhengHei" panose="020B0604030504040204" pitchFamily="34" charset="-120"/>
+              </a:rPr>
+              <a:t>結尾</a:t>
+            </a:r>
+            <a:r>
+              <a:rPr lang="en-US" sz="3200" b="1" dirty="0">
+                <a:solidFill>
+                  <a:srgbClr val="660033"/>
+                </a:solidFill>
+                <a:latin typeface="Microsoft JhengHei" panose="020B0604030504040204" pitchFamily="34" charset="-120"/>
+                <a:ea typeface="Microsoft JhengHei" panose="020B0604030504040204" pitchFamily="34" charset="-120"/>
+              </a:rPr>
+              <a:t> )</a:t>
+            </a:r>
+            <a:endParaRPr lang="vi-VN" sz="3200" b="1" dirty="0">
               <a:solidFill>
                 <a:srgbClr val="660033"/>
               </a:solidFill>
+              <a:ea typeface="Microsoft JhengHei" panose="020B0604030504040204" pitchFamily="34" charset="-120"/>
             </a:endParaRPr>
           </a:p>
         </p:txBody>
@@ -4610,7 +4663,7 @@
               <a:t>天父祢名是多麼美 </a:t>
             </a:r>
             <a:r>
-              <a:rPr lang="en-US" altLang="zh-TW" sz="6400" b="1" dirty="0" smtClean="0">
+              <a:rPr lang="en-US" altLang="zh-TW" sz="6400" b="1" dirty="0">
                 <a:solidFill>
                   <a:srgbClr val="660033"/>
                 </a:solidFill>
@@ -4620,24 +4673,14 @@
               <a:t>  </a:t>
             </a:r>
             <a:r>
-              <a:rPr lang="zh-TW" altLang="en-US" sz="6400" b="1" dirty="0" smtClean="0">
+              <a:rPr lang="zh-TW" altLang="en-US" sz="6400" b="1" dirty="0">
                 <a:solidFill>
                   <a:srgbClr val="660033"/>
                 </a:solidFill>
                 <a:latin typeface="微軟正黑體" pitchFamily="34" charset="-120"/>
                 <a:ea typeface="微軟正黑體" pitchFamily="34" charset="-120"/>
               </a:rPr>
-              <a:t>榮</a:t>
-            </a:r>
-            <a:r>
-              <a:rPr lang="zh-TW" altLang="en-US" sz="6400" b="1" dirty="0">
-                <a:solidFill>
-                  <a:srgbClr val="660033"/>
-                </a:solidFill>
-                <a:latin typeface="微軟正黑體" pitchFamily="34" charset="-120"/>
-                <a:ea typeface="微軟正黑體" pitchFamily="34" charset="-120"/>
-              </a:rPr>
-              <a:t>耀遍全地</a:t>
+              <a:t>榮耀遍全地</a:t>
             </a:r>
             <a:endParaRPr lang="en-US" sz="6400" b="1" dirty="0">
               <a:solidFill>
@@ -4680,7 +4723,7 @@
         <p:spPr>
           <a:xfrm>
             <a:off x="0" y="5158596"/>
-            <a:ext cx="12192000" cy="769441"/>
+            <a:ext cx="12192000" cy="584775"/>
           </a:xfrm>
           <a:prstGeom prst="rect">
             <a:avLst/>
@@ -4695,17 +4738,40 @@
           <a:p>
             <a:pPr algn="ctr"/>
             <a:r>
-              <a:rPr lang="en-US" sz="4400" b="1" dirty="0" smtClean="0">
-                <a:solidFill>
-                  <a:srgbClr val="660033"/>
-                </a:solidFill>
-              </a:rPr>
-              <a:t>( Verse 1 )</a:t>
-            </a:r>
-            <a:endParaRPr lang="vi-VN" sz="4400" b="1" dirty="0">
+              <a:rPr lang="en-US" sz="3200" b="1" dirty="0">
+                <a:solidFill>
+                  <a:srgbClr val="660033"/>
+                </a:solidFill>
+                <a:latin typeface="Microsoft JhengHei" panose="020B0604030504040204" pitchFamily="34" charset="-120"/>
+                <a:ea typeface="Microsoft JhengHei" panose="020B0604030504040204" pitchFamily="34" charset="-120"/>
+              </a:rPr>
+              <a:t>( </a:t>
+            </a:r>
+            <a:r>
+              <a:rPr lang="zh-CN" altLang="en-US" sz="3200" b="1" dirty="0">
+                <a:solidFill>
+                  <a:srgbClr val="660033"/>
+                </a:solidFill>
+                <a:latin typeface="Microsoft JhengHei" panose="020B0604030504040204" pitchFamily="34" charset="-120"/>
+                <a:ea typeface="Microsoft JhengHei" panose="020B0604030504040204" pitchFamily="34" charset="-120"/>
+              </a:rPr>
+              <a:t>正歌</a:t>
+            </a:r>
+            <a:r>
+              <a:rPr lang="en-US" sz="3200" b="1" dirty="0">
+                <a:solidFill>
+                  <a:srgbClr val="660033"/>
+                </a:solidFill>
+                <a:latin typeface="Microsoft JhengHei" panose="020B0604030504040204" pitchFamily="34" charset="-120"/>
+                <a:ea typeface="Microsoft JhengHei" panose="020B0604030504040204" pitchFamily="34" charset="-120"/>
+              </a:rPr>
+              <a:t> 1 )</a:t>
+            </a:r>
+            <a:endParaRPr lang="vi-VN" sz="3200" b="1" dirty="0">
               <a:solidFill>
                 <a:srgbClr val="660033"/>
               </a:solidFill>
+              <a:ea typeface="Microsoft JhengHei" panose="020B0604030504040204" pitchFamily="34" charset="-120"/>
             </a:endParaRPr>
           </a:p>
         </p:txBody>
@@ -4773,27 +4839,7 @@
                 <a:latin typeface="微軟正黑體" pitchFamily="34" charset="-120"/>
                 <a:ea typeface="微軟正黑體" pitchFamily="34" charset="-120"/>
               </a:rPr>
-              <a:t>恬靜 我沈默主座前 </a:t>
-            </a:r>
-            <a:r>
-              <a:rPr lang="zh-TW" altLang="en-US" sz="6400" b="1" dirty="0" smtClean="0">
-                <a:solidFill>
-                  <a:srgbClr val="660033"/>
-                </a:solidFill>
-                <a:latin typeface="微軟正黑體" pitchFamily="34" charset="-120"/>
-                <a:ea typeface="微軟正黑體" pitchFamily="34" charset="-120"/>
-              </a:rPr>
-              <a:t> 毋</a:t>
-            </a:r>
-            <a:r>
-              <a:rPr lang="zh-TW" altLang="en-US" sz="6400" b="1" dirty="0">
-                <a:solidFill>
-                  <a:srgbClr val="660033"/>
-                </a:solidFill>
-                <a:latin typeface="微軟正黑體" pitchFamily="34" charset="-120"/>
-                <a:ea typeface="微軟正黑體" pitchFamily="34" charset="-120"/>
-              </a:rPr>
-              <a:t>用多片言</a:t>
+              <a:t>恬靜 我沈默主座前  毋用多片言</a:t>
             </a:r>
             <a:endParaRPr lang="en-US" altLang="zh-TW" sz="6400" b="1" dirty="0">
               <a:solidFill>
@@ -4815,37 +4861,7 @@
                 <a:latin typeface="微軟正黑體" pitchFamily="34" charset="-120"/>
                 <a:ea typeface="微軟正黑體" pitchFamily="34" charset="-120"/>
               </a:rPr>
-              <a:t>在禱告前 </a:t>
-            </a:r>
-            <a:r>
-              <a:rPr lang="zh-TW" altLang="en-US" sz="6400" b="1" dirty="0" smtClean="0">
-                <a:solidFill>
-                  <a:srgbClr val="660033"/>
-                </a:solidFill>
-                <a:latin typeface="微軟正黑體" pitchFamily="34" charset="-120"/>
-                <a:ea typeface="微軟正黑體" pitchFamily="34" charset="-120"/>
-              </a:rPr>
-              <a:t> 祢</a:t>
-            </a:r>
-            <a:r>
-              <a:rPr lang="zh-TW" altLang="en-US" sz="6400" b="1" dirty="0">
-                <a:solidFill>
-                  <a:srgbClr val="660033"/>
-                </a:solidFill>
-                <a:latin typeface="微軟正黑體" pitchFamily="34" charset="-120"/>
-                <a:ea typeface="微軟正黑體" pitchFamily="34" charset="-120"/>
-              </a:rPr>
-              <a:t>已清楚我需</a:t>
-            </a:r>
-            <a:r>
-              <a:rPr lang="zh-TW" altLang="en-US" sz="6400" b="1" dirty="0" smtClean="0">
-                <a:solidFill>
-                  <a:srgbClr val="660033"/>
-                </a:solidFill>
-                <a:latin typeface="微軟正黑體" pitchFamily="34" charset="-120"/>
-                <a:ea typeface="微軟正黑體" pitchFamily="34" charset="-120"/>
-              </a:rPr>
-              <a:t>要</a:t>
+              <a:t>在禱告前  祢已清楚我需要</a:t>
             </a:r>
             <a:endParaRPr lang="en-US" altLang="zh-TW" sz="6400" b="1" dirty="0">
               <a:solidFill>
@@ -4866,7 +4882,7 @@
         <p:spPr>
           <a:xfrm>
             <a:off x="0" y="5158596"/>
-            <a:ext cx="12192000" cy="769441"/>
+            <a:ext cx="12192000" cy="584775"/>
           </a:xfrm>
           <a:prstGeom prst="rect">
             <a:avLst/>
@@ -4881,17 +4897,40 @@
           <a:p>
             <a:pPr algn="ctr"/>
             <a:r>
-              <a:rPr lang="en-US" sz="4400" b="1" dirty="0" smtClean="0">
-                <a:solidFill>
-                  <a:srgbClr val="660033"/>
-                </a:solidFill>
-              </a:rPr>
-              <a:t>( Verse 1 )</a:t>
-            </a:r>
-            <a:endParaRPr lang="vi-VN" sz="4400" b="1" dirty="0">
+              <a:rPr lang="en-US" sz="3200" b="1" dirty="0">
+                <a:solidFill>
+                  <a:srgbClr val="660033"/>
+                </a:solidFill>
+                <a:latin typeface="Microsoft JhengHei" panose="020B0604030504040204" pitchFamily="34" charset="-120"/>
+                <a:ea typeface="Microsoft JhengHei" panose="020B0604030504040204" pitchFamily="34" charset="-120"/>
+              </a:rPr>
+              <a:t>( </a:t>
+            </a:r>
+            <a:r>
+              <a:rPr lang="zh-CN" altLang="en-US" sz="3200" b="1" dirty="0">
+                <a:solidFill>
+                  <a:srgbClr val="660033"/>
+                </a:solidFill>
+                <a:latin typeface="Microsoft JhengHei" panose="020B0604030504040204" pitchFamily="34" charset="-120"/>
+                <a:ea typeface="Microsoft JhengHei" panose="020B0604030504040204" pitchFamily="34" charset="-120"/>
+              </a:rPr>
+              <a:t>正歌</a:t>
+            </a:r>
+            <a:r>
+              <a:rPr lang="en-US" sz="3200" b="1" dirty="0">
+                <a:solidFill>
+                  <a:srgbClr val="660033"/>
+                </a:solidFill>
+                <a:latin typeface="Microsoft JhengHei" panose="020B0604030504040204" pitchFamily="34" charset="-120"/>
+                <a:ea typeface="Microsoft JhengHei" panose="020B0604030504040204" pitchFamily="34" charset="-120"/>
+              </a:rPr>
+              <a:t> 1 )</a:t>
+            </a:r>
+            <a:endParaRPr lang="vi-VN" sz="3200" b="1" dirty="0">
               <a:solidFill>
                 <a:srgbClr val="660033"/>
               </a:solidFill>
+              <a:ea typeface="Microsoft JhengHei" panose="020B0604030504040204" pitchFamily="34" charset="-120"/>
             </a:endParaRPr>
           </a:p>
         </p:txBody>
@@ -5002,7 +5041,7 @@
         <p:spPr>
           <a:xfrm>
             <a:off x="0" y="5158596"/>
-            <a:ext cx="12192000" cy="769441"/>
+            <a:ext cx="12192000" cy="584775"/>
           </a:xfrm>
           <a:prstGeom prst="rect">
             <a:avLst/>
@@ -5017,25 +5056,40 @@
           <a:p>
             <a:pPr algn="ctr"/>
             <a:r>
-              <a:rPr lang="en-US" sz="4400" b="1" dirty="0" smtClean="0">
-                <a:solidFill>
-                  <a:srgbClr val="660033"/>
-                </a:solidFill>
-              </a:rPr>
-              <a:t>( Pre-chorus </a:t>
-            </a:r>
-            <a:r>
-              <a:rPr lang="en-US" sz="4400" b="1" dirty="0">
-                <a:solidFill>
-                  <a:srgbClr val="660033"/>
-                </a:solidFill>
-              </a:rPr>
-              <a:t>)</a:t>
-            </a:r>
-            <a:endParaRPr lang="vi-VN" sz="4400" b="1" dirty="0">
+              <a:rPr lang="en-US" sz="3200" b="1" dirty="0">
+                <a:solidFill>
+                  <a:srgbClr val="660033"/>
+                </a:solidFill>
+                <a:latin typeface="Microsoft JhengHei" panose="020B0604030504040204" pitchFamily="34" charset="-120"/>
+                <a:ea typeface="Microsoft JhengHei" panose="020B0604030504040204" pitchFamily="34" charset="-120"/>
+              </a:rPr>
+              <a:t>( </a:t>
+            </a:r>
+            <a:r>
+              <a:rPr lang="zh-CN" altLang="en-US" sz="3200" b="1" dirty="0">
+                <a:solidFill>
+                  <a:srgbClr val="660033"/>
+                </a:solidFill>
+                <a:latin typeface="Microsoft JhengHei" panose="020B0604030504040204" pitchFamily="34" charset="-120"/>
+                <a:ea typeface="Microsoft JhengHei" panose="020B0604030504040204" pitchFamily="34" charset="-120"/>
+              </a:rPr>
+              <a:t>前副歌</a:t>
+            </a:r>
+            <a:r>
+              <a:rPr lang="en-US" sz="3200" b="1" dirty="0">
+                <a:solidFill>
+                  <a:srgbClr val="660033"/>
+                </a:solidFill>
+                <a:latin typeface="Microsoft JhengHei" panose="020B0604030504040204" pitchFamily="34" charset="-120"/>
+                <a:ea typeface="Microsoft JhengHei" panose="020B0604030504040204" pitchFamily="34" charset="-120"/>
+              </a:rPr>
+              <a:t> )</a:t>
+            </a:r>
+            <a:endParaRPr lang="vi-VN" sz="3200" b="1" dirty="0">
               <a:solidFill>
                 <a:srgbClr val="660033"/>
               </a:solidFill>
+              <a:ea typeface="Microsoft JhengHei" panose="020B0604030504040204" pitchFamily="34" charset="-120"/>
             </a:endParaRPr>
           </a:p>
         </p:txBody>
@@ -5146,7 +5200,7 @@
         <p:spPr>
           <a:xfrm>
             <a:off x="0" y="5158596"/>
-            <a:ext cx="12192000" cy="769441"/>
+            <a:ext cx="12192000" cy="584775"/>
           </a:xfrm>
           <a:prstGeom prst="rect">
             <a:avLst/>
@@ -5161,25 +5215,40 @@
           <a:p>
             <a:pPr algn="ctr"/>
             <a:r>
-              <a:rPr lang="en-US" sz="4400" b="1" dirty="0" smtClean="0">
-                <a:solidFill>
-                  <a:srgbClr val="660033"/>
-                </a:solidFill>
-              </a:rPr>
-              <a:t>( Pre-chorus </a:t>
-            </a:r>
-            <a:r>
-              <a:rPr lang="en-US" sz="4400" b="1" dirty="0">
-                <a:solidFill>
-                  <a:srgbClr val="660033"/>
-                </a:solidFill>
-              </a:rPr>
-              <a:t>)</a:t>
-            </a:r>
-            <a:endParaRPr lang="vi-VN" sz="4400" b="1" dirty="0">
+              <a:rPr lang="en-US" sz="3200" b="1" dirty="0">
+                <a:solidFill>
+                  <a:srgbClr val="660033"/>
+                </a:solidFill>
+                <a:latin typeface="Microsoft JhengHei" panose="020B0604030504040204" pitchFamily="34" charset="-120"/>
+                <a:ea typeface="Microsoft JhengHei" panose="020B0604030504040204" pitchFamily="34" charset="-120"/>
+              </a:rPr>
+              <a:t>( </a:t>
+            </a:r>
+            <a:r>
+              <a:rPr lang="zh-CN" altLang="en-US" sz="3200" b="1" dirty="0">
+                <a:solidFill>
+                  <a:srgbClr val="660033"/>
+                </a:solidFill>
+                <a:latin typeface="Microsoft JhengHei" panose="020B0604030504040204" pitchFamily="34" charset="-120"/>
+                <a:ea typeface="Microsoft JhengHei" panose="020B0604030504040204" pitchFamily="34" charset="-120"/>
+              </a:rPr>
+              <a:t>前副歌</a:t>
+            </a:r>
+            <a:r>
+              <a:rPr lang="en-US" sz="3200" b="1" dirty="0">
+                <a:solidFill>
+                  <a:srgbClr val="660033"/>
+                </a:solidFill>
+                <a:latin typeface="Microsoft JhengHei" panose="020B0604030504040204" pitchFamily="34" charset="-120"/>
+                <a:ea typeface="Microsoft JhengHei" panose="020B0604030504040204" pitchFamily="34" charset="-120"/>
+              </a:rPr>
+              <a:t> )</a:t>
+            </a:r>
+            <a:endParaRPr lang="vi-VN" sz="3200" b="1" dirty="0">
               <a:solidFill>
                 <a:srgbClr val="660033"/>
               </a:solidFill>
+              <a:ea typeface="Microsoft JhengHei" panose="020B0604030504040204" pitchFamily="34" charset="-120"/>
             </a:endParaRPr>
           </a:p>
         </p:txBody>
@@ -5290,7 +5359,7 @@
         <p:spPr>
           <a:xfrm>
             <a:off x="0" y="5158596"/>
-            <a:ext cx="12192000" cy="769441"/>
+            <a:ext cx="12192000" cy="584775"/>
           </a:xfrm>
           <a:prstGeom prst="rect">
             <a:avLst/>
@@ -5305,25 +5374,40 @@
           <a:p>
             <a:pPr algn="ctr"/>
             <a:r>
-              <a:rPr lang="en-US" sz="4400" b="1" dirty="0" smtClean="0">
-                <a:solidFill>
-                  <a:srgbClr val="660033"/>
-                </a:solidFill>
-              </a:rPr>
-              <a:t>( Chorus </a:t>
-            </a:r>
-            <a:r>
-              <a:rPr lang="en-US" sz="4400" b="1" dirty="0">
-                <a:solidFill>
-                  <a:srgbClr val="660033"/>
-                </a:solidFill>
-              </a:rPr>
-              <a:t>)</a:t>
-            </a:r>
-            <a:endParaRPr lang="vi-VN" sz="4400" b="1" dirty="0">
+              <a:rPr lang="en-US" sz="3200" b="1" dirty="0">
+                <a:solidFill>
+                  <a:srgbClr val="660033"/>
+                </a:solidFill>
+                <a:latin typeface="Microsoft JhengHei" panose="020B0604030504040204" pitchFamily="34" charset="-120"/>
+                <a:ea typeface="Microsoft JhengHei" panose="020B0604030504040204" pitchFamily="34" charset="-120"/>
+              </a:rPr>
+              <a:t>( </a:t>
+            </a:r>
+            <a:r>
+              <a:rPr lang="zh-CN" altLang="en-US" sz="3200" b="1" dirty="0">
+                <a:solidFill>
+                  <a:srgbClr val="660033"/>
+                </a:solidFill>
+                <a:latin typeface="Microsoft JhengHei" panose="020B0604030504040204" pitchFamily="34" charset="-120"/>
+                <a:ea typeface="Microsoft JhengHei" panose="020B0604030504040204" pitchFamily="34" charset="-120"/>
+              </a:rPr>
+              <a:t>副歌</a:t>
+            </a:r>
+            <a:r>
+              <a:rPr lang="en-US" sz="3200" b="1" dirty="0">
+                <a:solidFill>
+                  <a:srgbClr val="660033"/>
+                </a:solidFill>
+                <a:latin typeface="Microsoft JhengHei" panose="020B0604030504040204" pitchFamily="34" charset="-120"/>
+                <a:ea typeface="Microsoft JhengHei" panose="020B0604030504040204" pitchFamily="34" charset="-120"/>
+              </a:rPr>
+              <a:t> )</a:t>
+            </a:r>
+            <a:endParaRPr lang="vi-VN" sz="3200" b="1" dirty="0">
               <a:solidFill>
                 <a:srgbClr val="660033"/>
               </a:solidFill>
+              <a:ea typeface="Microsoft JhengHei" panose="020B0604030504040204" pitchFamily="34" charset="-120"/>
             </a:endParaRPr>
           </a:p>
         </p:txBody>
@@ -5434,7 +5518,7 @@
         <p:spPr>
           <a:xfrm>
             <a:off x="0" y="5158596"/>
-            <a:ext cx="12192000" cy="769441"/>
+            <a:ext cx="12192000" cy="584775"/>
           </a:xfrm>
           <a:prstGeom prst="rect">
             <a:avLst/>
@@ -5449,25 +5533,40 @@
           <a:p>
             <a:pPr algn="ctr"/>
             <a:r>
-              <a:rPr lang="en-US" sz="4400" b="1" dirty="0" smtClean="0">
-                <a:solidFill>
-                  <a:srgbClr val="660033"/>
-                </a:solidFill>
-              </a:rPr>
-              <a:t>( Chorus </a:t>
-            </a:r>
-            <a:r>
-              <a:rPr lang="en-US" sz="4400" b="1" dirty="0">
-                <a:solidFill>
-                  <a:srgbClr val="660033"/>
-                </a:solidFill>
-              </a:rPr>
-              <a:t>)</a:t>
-            </a:r>
-            <a:endParaRPr lang="vi-VN" sz="4400" b="1" dirty="0">
+              <a:rPr lang="en-US" sz="3200" b="1" dirty="0">
+                <a:solidFill>
+                  <a:srgbClr val="660033"/>
+                </a:solidFill>
+                <a:latin typeface="Microsoft JhengHei" panose="020B0604030504040204" pitchFamily="34" charset="-120"/>
+                <a:ea typeface="Microsoft JhengHei" panose="020B0604030504040204" pitchFamily="34" charset="-120"/>
+              </a:rPr>
+              <a:t>( </a:t>
+            </a:r>
+            <a:r>
+              <a:rPr lang="zh-CN" altLang="en-US" sz="3200" b="1" dirty="0">
+                <a:solidFill>
+                  <a:srgbClr val="660033"/>
+                </a:solidFill>
+                <a:latin typeface="Microsoft JhengHei" panose="020B0604030504040204" pitchFamily="34" charset="-120"/>
+                <a:ea typeface="Microsoft JhengHei" panose="020B0604030504040204" pitchFamily="34" charset="-120"/>
+              </a:rPr>
+              <a:t>副歌</a:t>
+            </a:r>
+            <a:r>
+              <a:rPr lang="en-US" sz="3200" b="1" dirty="0">
+                <a:solidFill>
+                  <a:srgbClr val="660033"/>
+                </a:solidFill>
+                <a:latin typeface="Microsoft JhengHei" panose="020B0604030504040204" pitchFamily="34" charset="-120"/>
+                <a:ea typeface="Microsoft JhengHei" panose="020B0604030504040204" pitchFamily="34" charset="-120"/>
+              </a:rPr>
+              <a:t> )</a:t>
+            </a:r>
+            <a:endParaRPr lang="vi-VN" sz="3200" b="1" dirty="0">
               <a:solidFill>
                 <a:srgbClr val="660033"/>
               </a:solidFill>
+              <a:ea typeface="Microsoft JhengHei" panose="020B0604030504040204" pitchFamily="34" charset="-120"/>
             </a:endParaRPr>
           </a:p>
         </p:txBody>
@@ -5578,7 +5677,7 @@
         <p:spPr>
           <a:xfrm>
             <a:off x="0" y="5158596"/>
-            <a:ext cx="12192000" cy="769441"/>
+            <a:ext cx="12192000" cy="584775"/>
           </a:xfrm>
           <a:prstGeom prst="rect">
             <a:avLst/>
@@ -5593,25 +5692,40 @@
           <a:p>
             <a:pPr algn="ctr"/>
             <a:r>
-              <a:rPr lang="en-US" sz="4400" b="1" dirty="0" smtClean="0">
-                <a:solidFill>
-                  <a:srgbClr val="660033"/>
-                </a:solidFill>
-              </a:rPr>
-              <a:t>( Chorus </a:t>
-            </a:r>
-            <a:r>
-              <a:rPr lang="en-US" sz="4400" b="1" dirty="0">
-                <a:solidFill>
-                  <a:srgbClr val="660033"/>
-                </a:solidFill>
-              </a:rPr>
-              <a:t>)</a:t>
-            </a:r>
-            <a:endParaRPr lang="vi-VN" sz="4400" b="1" dirty="0">
+              <a:rPr lang="en-US" sz="3200" b="1" dirty="0">
+                <a:solidFill>
+                  <a:srgbClr val="660033"/>
+                </a:solidFill>
+                <a:latin typeface="Microsoft JhengHei" panose="020B0604030504040204" pitchFamily="34" charset="-120"/>
+                <a:ea typeface="Microsoft JhengHei" panose="020B0604030504040204" pitchFamily="34" charset="-120"/>
+              </a:rPr>
+              <a:t>( </a:t>
+            </a:r>
+            <a:r>
+              <a:rPr lang="zh-CN" altLang="en-US" sz="3200" b="1" dirty="0">
+                <a:solidFill>
+                  <a:srgbClr val="660033"/>
+                </a:solidFill>
+                <a:latin typeface="Microsoft JhengHei" panose="020B0604030504040204" pitchFamily="34" charset="-120"/>
+                <a:ea typeface="Microsoft JhengHei" panose="020B0604030504040204" pitchFamily="34" charset="-120"/>
+              </a:rPr>
+              <a:t>副歌</a:t>
+            </a:r>
+            <a:r>
+              <a:rPr lang="en-US" sz="3200" b="1" dirty="0">
+                <a:solidFill>
+                  <a:srgbClr val="660033"/>
+                </a:solidFill>
+                <a:latin typeface="Microsoft JhengHei" panose="020B0604030504040204" pitchFamily="34" charset="-120"/>
+                <a:ea typeface="Microsoft JhengHei" panose="020B0604030504040204" pitchFamily="34" charset="-120"/>
+              </a:rPr>
+              <a:t> )</a:t>
+            </a:r>
+            <a:endParaRPr lang="vi-VN" sz="3200" b="1" dirty="0">
               <a:solidFill>
                 <a:srgbClr val="660033"/>
               </a:solidFill>
+              <a:ea typeface="Microsoft JhengHei" panose="020B0604030504040204" pitchFamily="34" charset="-120"/>
             </a:endParaRPr>
           </a:p>
         </p:txBody>
@@ -5722,7 +5836,7 @@
         <p:spPr>
           <a:xfrm>
             <a:off x="0" y="5158596"/>
-            <a:ext cx="12192000" cy="769441"/>
+            <a:ext cx="12192000" cy="584775"/>
           </a:xfrm>
           <a:prstGeom prst="rect">
             <a:avLst/>
@@ -5737,25 +5851,40 @@
           <a:p>
             <a:pPr algn="ctr"/>
             <a:r>
-              <a:rPr lang="en-US" sz="4400" b="1" dirty="0" smtClean="0">
-                <a:solidFill>
-                  <a:srgbClr val="660033"/>
-                </a:solidFill>
-              </a:rPr>
-              <a:t>( Chorus </a:t>
-            </a:r>
-            <a:r>
-              <a:rPr lang="en-US" sz="4400" b="1" dirty="0">
-                <a:solidFill>
-                  <a:srgbClr val="660033"/>
-                </a:solidFill>
-              </a:rPr>
-              <a:t>)</a:t>
-            </a:r>
-            <a:endParaRPr lang="vi-VN" sz="4400" b="1" dirty="0">
+              <a:rPr lang="en-US" sz="3200" b="1" dirty="0">
+                <a:solidFill>
+                  <a:srgbClr val="660033"/>
+                </a:solidFill>
+                <a:latin typeface="Microsoft JhengHei" panose="020B0604030504040204" pitchFamily="34" charset="-120"/>
+                <a:ea typeface="Microsoft JhengHei" panose="020B0604030504040204" pitchFamily="34" charset="-120"/>
+              </a:rPr>
+              <a:t>( </a:t>
+            </a:r>
+            <a:r>
+              <a:rPr lang="zh-CN" altLang="en-US" sz="3200" b="1" dirty="0">
+                <a:solidFill>
+                  <a:srgbClr val="660033"/>
+                </a:solidFill>
+                <a:latin typeface="Microsoft JhengHei" panose="020B0604030504040204" pitchFamily="34" charset="-120"/>
+                <a:ea typeface="Microsoft JhengHei" panose="020B0604030504040204" pitchFamily="34" charset="-120"/>
+              </a:rPr>
+              <a:t>副歌</a:t>
+            </a:r>
+            <a:r>
+              <a:rPr lang="en-US" sz="3200" b="1" dirty="0">
+                <a:solidFill>
+                  <a:srgbClr val="660033"/>
+                </a:solidFill>
+                <a:latin typeface="Microsoft JhengHei" panose="020B0604030504040204" pitchFamily="34" charset="-120"/>
+                <a:ea typeface="Microsoft JhengHei" panose="020B0604030504040204" pitchFamily="34" charset="-120"/>
+              </a:rPr>
+              <a:t> )</a:t>
+            </a:r>
+            <a:endParaRPr lang="vi-VN" sz="3200" b="1" dirty="0">
               <a:solidFill>
                 <a:srgbClr val="660033"/>
               </a:solidFill>
+              <a:ea typeface="Microsoft JhengHei" panose="020B0604030504040204" pitchFamily="34" charset="-120"/>
             </a:endParaRPr>
           </a:p>
         </p:txBody>
